--- a/resources/year8/L3_The_YIntercept_and_y_mx_c.pptx
+++ b/resources/year8/L3_The_YIntercept_and_y_mx_c.pptx
@@ -9670,8 +9670,8 @@
         </p:nvSpPr>
         <p:spPr>
           <a:xfrm>
-            <a:off x="457200" y="777240"/>
-            <a:ext cx="11277295" cy="640080"/>
+            <a:off x="457200" y="685800"/>
+            <a:ext cx="11277295" cy="457200"/>
           </a:xfrm>
           <a:prstGeom prst="rect">
             <a:avLst/>
@@ -9693,7 +9693,7 @@
               </a:spcAft>
             </a:pPr>
             <a:r>
-              <a:rPr sz="3400" b="1" i="0">
+              <a:rPr sz="2800" b="1" i="0">
                 <a:solidFill>
                   <a:srgbClr val="000000"/>
                 </a:solidFill>
@@ -9712,8 +9712,8 @@
         </p:nvSpPr>
         <p:spPr>
           <a:xfrm>
-            <a:off x="457200" y="1645920"/>
-            <a:ext cx="11277295" cy="2926080"/>
+            <a:off x="457200" y="1170432"/>
+            <a:ext cx="11277295" cy="502920"/>
           </a:xfrm>
           <a:prstGeom prst="rect">
             <a:avLst/>
@@ -9731,69 +9731,383 @@
                 <a:spcPts val="0"/>
               </a:spcBef>
               <a:spcAft>
-                <a:spcPts val="1200"/>
+                <a:spcPts val="0"/>
               </a:spcAft>
             </a:pPr>
             <a:r>
-              <a:rPr sz="2200" b="0" i="0">
+              <a:rPr sz="1300" b="0" i="1">
+                <a:solidFill>
+                  <a:srgbClr val="595959"/>
+                </a:solidFill>
+                <a:latin typeface="Arial"/>
+              </a:rPr>
+              <a:t>Show each equation. Race to write the gradient and y-intercept on whiteboards — first correct scores.</a:t>
+            </a:r>
+          </a:p>
+        </p:txBody>
+      </p:sp>
+      <p:sp>
+        <p:nvSpPr>
+          <p:cNvPr id="6" name="TextBox 5"/>
+          <p:cNvSpPr txBox="1"/>
+          <p:nvPr/>
+        </p:nvSpPr>
+        <p:spPr>
+          <a:xfrm>
+            <a:off x="457200" y="1874519"/>
+            <a:ext cx="5455767" cy="971550"/>
+          </a:xfrm>
+          <a:prstGeom prst="rect">
+            <a:avLst/>
+          </a:prstGeom>
+          <a:noFill/>
+        </p:spPr>
+        <p:txBody>
+          <a:bodyPr wrap="square" anchor="ctr" lIns="0" rIns="0" tIns="0" bIns="0">
+            <a:spAutoFit/>
+          </a:bodyPr>
+          <a:lstStyle/>
+          <a:p>
+            <a:pPr algn="l"/>
+            <a:r>
+              <a:rPr sz="1500" b="1" i="0">
                 <a:solidFill>
                   <a:srgbClr val="000000"/>
                 </a:solidFill>
                 <a:latin typeface="Arial"/>
               </a:rPr>
-              <a:t>-  The teacher shows an equation in the form y = mx + c.</a:t>
-            </a:r>
-          </a:p>
-          <a:p>
-            <a:pPr algn="l">
-              <a:spcBef>
-                <a:spcPts val="0"/>
-              </a:spcBef>
-              <a:spcAft>
-                <a:spcPts val="1200"/>
-              </a:spcAft>
-            </a:pPr>
-            <a:r>
-              <a:rPr sz="2200" b="0" i="0">
+              <a:t>1. y = 3x + 2   </a:t>
+            </a:r>
+            <a:r>
+              <a:rPr sz="1500" b="1" i="0">
+                <a:solidFill>
+                  <a:srgbClr val="2B6B3D"/>
+                </a:solidFill>
+                <a:latin typeface="Arial"/>
+              </a:rPr>
+              <a:t>m = 3, c = 2</a:t>
+            </a:r>
+          </a:p>
+        </p:txBody>
+      </p:sp>
+      <p:sp>
+        <p:nvSpPr>
+          <p:cNvPr id="7" name="TextBox 6"/>
+          <p:cNvSpPr txBox="1"/>
+          <p:nvPr/>
+        </p:nvSpPr>
+        <p:spPr>
+          <a:xfrm>
+            <a:off x="457200" y="2846069"/>
+            <a:ext cx="5455767" cy="971550"/>
+          </a:xfrm>
+          <a:prstGeom prst="rect">
+            <a:avLst/>
+          </a:prstGeom>
+          <a:noFill/>
+        </p:spPr>
+        <p:txBody>
+          <a:bodyPr wrap="square" anchor="ctr" lIns="0" rIns="0" tIns="0" bIns="0">
+            <a:spAutoFit/>
+          </a:bodyPr>
+          <a:lstStyle/>
+          <a:p>
+            <a:pPr algn="l"/>
+            <a:r>
+              <a:rPr sz="1500" b="1" i="0">
                 <a:solidFill>
                   <a:srgbClr val="000000"/>
                 </a:solidFill>
                 <a:latin typeface="Arial"/>
               </a:rPr>
-              <a:t>-  Race to write the gradient and y-intercept on your whiteboard — first correct answer scores a point.</a:t>
-            </a:r>
-          </a:p>
-          <a:p>
-            <a:pPr algn="l">
-              <a:spcBef>
-                <a:spcPts val="0"/>
-              </a:spcBef>
-              <a:spcAft>
-                <a:spcPts val="1200"/>
-              </a:spcAft>
-            </a:pPr>
-            <a:r>
-              <a:rPr sz="2200" b="0" i="0">
+              <a:t>2. y = -4x + 7   </a:t>
+            </a:r>
+            <a:r>
+              <a:rPr sz="1500" b="1" i="0">
+                <a:solidFill>
+                  <a:srgbClr val="2B6B3D"/>
+                </a:solidFill>
+                <a:latin typeface="Arial"/>
+              </a:rPr>
+              <a:t>m = -4, c = 7</a:t>
+            </a:r>
+          </a:p>
+        </p:txBody>
+      </p:sp>
+      <p:sp>
+        <p:nvSpPr>
+          <p:cNvPr id="8" name="TextBox 7"/>
+          <p:cNvSpPr txBox="1"/>
+          <p:nvPr/>
+        </p:nvSpPr>
+        <p:spPr>
+          <a:xfrm>
+            <a:off x="457200" y="3817619"/>
+            <a:ext cx="5455767" cy="971550"/>
+          </a:xfrm>
+          <a:prstGeom prst="rect">
+            <a:avLst/>
+          </a:prstGeom>
+          <a:noFill/>
+        </p:spPr>
+        <p:txBody>
+          <a:bodyPr wrap="square" anchor="ctr" lIns="0" rIns="0" tIns="0" bIns="0">
+            <a:spAutoFit/>
+          </a:bodyPr>
+          <a:lstStyle/>
+          <a:p>
+            <a:pPr algn="l"/>
+            <a:r>
+              <a:rPr sz="1500" b="1" i="0">
                 <a:solidFill>
                   <a:srgbClr val="000000"/>
                 </a:solidFill>
                 <a:latin typeface="Arial"/>
               </a:rPr>
-              <a:t>-  Difficulty increases each round: negative gradients, then decimals.</a:t>
-            </a:r>
-          </a:p>
-        </p:txBody>
-      </p:sp>
-      <p:sp>
-        <p:nvSpPr>
-          <p:cNvPr id="6" name="Rounded Rectangle 5"/>
+              <a:t>3. y = x − 5   </a:t>
+            </a:r>
+            <a:r>
+              <a:rPr sz="1500" b="1" i="0">
+                <a:solidFill>
+                  <a:srgbClr val="2B6B3D"/>
+                </a:solidFill>
+                <a:latin typeface="Arial"/>
+              </a:rPr>
+              <a:t>m = 1, c = -5</a:t>
+            </a:r>
+          </a:p>
+        </p:txBody>
+      </p:sp>
+      <p:sp>
+        <p:nvSpPr>
+          <p:cNvPr id="9" name="TextBox 8"/>
+          <p:cNvSpPr txBox="1"/>
+          <p:nvPr/>
+        </p:nvSpPr>
+        <p:spPr>
+          <a:xfrm>
+            <a:off x="457200" y="4789169"/>
+            <a:ext cx="5455767" cy="971550"/>
+          </a:xfrm>
+          <a:prstGeom prst="rect">
+            <a:avLst/>
+          </a:prstGeom>
+          <a:noFill/>
+        </p:spPr>
+        <p:txBody>
+          <a:bodyPr wrap="square" anchor="ctr" lIns="0" rIns="0" tIns="0" bIns="0">
+            <a:spAutoFit/>
+          </a:bodyPr>
+          <a:lstStyle/>
+          <a:p>
+            <a:pPr algn="l"/>
+            <a:r>
+              <a:rPr sz="1500" b="1" i="0">
+                <a:solidFill>
+                  <a:srgbClr val="000000"/>
+                </a:solidFill>
+                <a:latin typeface="Arial"/>
+              </a:rPr>
+              <a:t>4. y = -2x − 1   </a:t>
+            </a:r>
+            <a:r>
+              <a:rPr sz="1500" b="1" i="0">
+                <a:solidFill>
+                  <a:srgbClr val="2B6B3D"/>
+                </a:solidFill>
+                <a:latin typeface="Arial"/>
+              </a:rPr>
+              <a:t>m = -2, c = -1</a:t>
+            </a:r>
+          </a:p>
+        </p:txBody>
+      </p:sp>
+      <p:sp>
+        <p:nvSpPr>
+          <p:cNvPr id="10" name="TextBox 9"/>
+          <p:cNvSpPr txBox="1"/>
+          <p:nvPr/>
+        </p:nvSpPr>
+        <p:spPr>
+          <a:xfrm>
+            <a:off x="6278727" y="1874519"/>
+            <a:ext cx="5455767" cy="971550"/>
+          </a:xfrm>
+          <a:prstGeom prst="rect">
+            <a:avLst/>
+          </a:prstGeom>
+          <a:noFill/>
+        </p:spPr>
+        <p:txBody>
+          <a:bodyPr wrap="square" anchor="ctr" lIns="0" rIns="0" tIns="0" bIns="0">
+            <a:spAutoFit/>
+          </a:bodyPr>
+          <a:lstStyle/>
+          <a:p>
+            <a:pPr algn="l"/>
+            <a:r>
+              <a:rPr sz="1500" b="1" i="0">
+                <a:solidFill>
+                  <a:srgbClr val="000000"/>
+                </a:solidFill>
+                <a:latin typeface="Arial"/>
+              </a:rPr>
+              <a:t>5. y = 0.5x + 6   </a:t>
+            </a:r>
+            <a:r>
+              <a:rPr sz="1500" b="1" i="0">
+                <a:solidFill>
+                  <a:srgbClr val="2B6B3D"/>
+                </a:solidFill>
+                <a:latin typeface="Arial"/>
+              </a:rPr>
+              <a:t>m = 0.5, c = 6</a:t>
+            </a:r>
+          </a:p>
+        </p:txBody>
+      </p:sp>
+      <p:sp>
+        <p:nvSpPr>
+          <p:cNvPr id="11" name="TextBox 10"/>
+          <p:cNvSpPr txBox="1"/>
+          <p:nvPr/>
+        </p:nvSpPr>
+        <p:spPr>
+          <a:xfrm>
+            <a:off x="6278727" y="2846069"/>
+            <a:ext cx="5455767" cy="971550"/>
+          </a:xfrm>
+          <a:prstGeom prst="rect">
+            <a:avLst/>
+          </a:prstGeom>
+          <a:noFill/>
+        </p:spPr>
+        <p:txBody>
+          <a:bodyPr wrap="square" anchor="ctr" lIns="0" rIns="0" tIns="0" bIns="0">
+            <a:spAutoFit/>
+          </a:bodyPr>
+          <a:lstStyle/>
+          <a:p>
+            <a:pPr algn="l"/>
+            <a:r>
+              <a:rPr sz="1500" b="1" i="0">
+                <a:solidFill>
+                  <a:srgbClr val="000000"/>
+                </a:solidFill>
+                <a:latin typeface="Arial"/>
+              </a:rPr>
+              <a:t>6. y = -x   </a:t>
+            </a:r>
+            <a:r>
+              <a:rPr sz="1500" b="1" i="0">
+                <a:solidFill>
+                  <a:srgbClr val="2B6B3D"/>
+                </a:solidFill>
+                <a:latin typeface="Arial"/>
+              </a:rPr>
+              <a:t>m = -1, c = 0</a:t>
+            </a:r>
+          </a:p>
+        </p:txBody>
+      </p:sp>
+      <p:sp>
+        <p:nvSpPr>
+          <p:cNvPr id="12" name="TextBox 11"/>
+          <p:cNvSpPr txBox="1"/>
+          <p:nvPr/>
+        </p:nvSpPr>
+        <p:spPr>
+          <a:xfrm>
+            <a:off x="6278727" y="3817619"/>
+            <a:ext cx="5455767" cy="971550"/>
+          </a:xfrm>
+          <a:prstGeom prst="rect">
+            <a:avLst/>
+          </a:prstGeom>
+          <a:noFill/>
+        </p:spPr>
+        <p:txBody>
+          <a:bodyPr wrap="square" anchor="ctr" lIns="0" rIns="0" tIns="0" bIns="0">
+            <a:spAutoFit/>
+          </a:bodyPr>
+          <a:lstStyle/>
+          <a:p>
+            <a:pPr algn="l"/>
+            <a:r>
+              <a:rPr sz="1500" b="1" i="0">
+                <a:solidFill>
+                  <a:srgbClr val="000000"/>
+                </a:solidFill>
+                <a:latin typeface="Arial"/>
+              </a:rPr>
+              <a:t>7. y = 6x − 3   </a:t>
+            </a:r>
+            <a:r>
+              <a:rPr sz="1500" b="1" i="0">
+                <a:solidFill>
+                  <a:srgbClr val="2B6B3D"/>
+                </a:solidFill>
+                <a:latin typeface="Arial"/>
+              </a:rPr>
+              <a:t>m = 6, c = -3</a:t>
+            </a:r>
+          </a:p>
+        </p:txBody>
+      </p:sp>
+      <p:sp>
+        <p:nvSpPr>
+          <p:cNvPr id="13" name="TextBox 12"/>
+          <p:cNvSpPr txBox="1"/>
+          <p:nvPr/>
+        </p:nvSpPr>
+        <p:spPr>
+          <a:xfrm>
+            <a:off x="6278727" y="4789169"/>
+            <a:ext cx="5455767" cy="971550"/>
+          </a:xfrm>
+          <a:prstGeom prst="rect">
+            <a:avLst/>
+          </a:prstGeom>
+          <a:noFill/>
+        </p:spPr>
+        <p:txBody>
+          <a:bodyPr wrap="square" anchor="ctr" lIns="0" rIns="0" tIns="0" bIns="0">
+            <a:spAutoFit/>
+          </a:bodyPr>
+          <a:lstStyle/>
+          <a:p>
+            <a:pPr algn="l"/>
+            <a:r>
+              <a:rPr sz="1500" b="1" i="0">
+                <a:solidFill>
+                  <a:srgbClr val="000000"/>
+                </a:solidFill>
+                <a:latin typeface="Arial"/>
+              </a:rPr>
+              <a:t>8. y = -0.25x + 4   </a:t>
+            </a:r>
+            <a:r>
+              <a:rPr sz="1500" b="1" i="0">
+                <a:solidFill>
+                  <a:srgbClr val="2B6B3D"/>
+                </a:solidFill>
+                <a:latin typeface="Arial"/>
+              </a:rPr>
+              <a:t>m = -0.25, c = 4</a:t>
+            </a:r>
+          </a:p>
+        </p:txBody>
+      </p:sp>
+      <p:sp>
+        <p:nvSpPr>
+          <p:cNvPr id="14" name="Rounded Rectangle 13"/>
           <p:cNvSpPr/>
           <p:nvPr/>
         </p:nvSpPr>
         <p:spPr>
           <a:xfrm>
-            <a:off x="457200" y="4937760"/>
-            <a:ext cx="11277295" cy="1097280"/>
+            <a:off x="457200" y="5897880"/>
+            <a:ext cx="11277295" cy="548640"/>
           </a:xfrm>
           <a:prstGeom prst="roundRect">
             <a:avLst/>
@@ -9828,7 +10142,7 @@
           <a:p>
             <a:pPr algn="ctr"/>
             <a:r>
-              <a:rPr sz="2200" b="1" i="0">
+              <a:rPr sz="1600" b="1" i="0">
                 <a:solidFill>
                   <a:srgbClr val="000000"/>
                 </a:solidFill>
@@ -9841,7 +10155,7 @@
       </p:sp>
       <p:sp>
         <p:nvSpPr>
-          <p:cNvPr id="7" name="TextBox 6"/>
+          <p:cNvPr id="15" name="TextBox 14"/>
           <p:cNvSpPr txBox="1"/>
           <p:nvPr/>
         </p:nvSpPr>
